--- a/FineTuningPipeLineOpenClaw.pptx
+++ b/FineTuningPipeLineOpenClaw.pptx
@@ -6,6 +6,7 @@
   </p:sldMasterIdLst>
   <p:sldIdLst>
     <p:sldId id="256" r:id="rId2"/>
+    <p:sldId id="257" r:id="rId3"/>
   </p:sldIdLst>
   <p:sldSz cx="12192000" cy="6858000"/>
   <p:notesSz cx="6858000" cy="9144000"/>
@@ -104,6 +105,11 @@
       </a:defRPr>
     </a:lvl9pPr>
   </p:defaultTextStyle>
+  <p:extLst>
+    <p:ext uri="{EFAFB233-063F-42B5-8137-9DF3F51BA10A}">
+      <p15:sldGuideLst xmlns:p15="http://schemas.microsoft.com/office/powerpoint/2012/main"/>
+    </p:ext>
+  </p:extLst>
 </p:presentation>
 </file>
 
@@ -6766,6 +6772,66 @@
 </p:sld>
 </file>
 
+<file path=ppt/slides/slide2.xml><?xml version="1.0" encoding="utf-8"?>
+<p:sld xmlns:a="http://schemas.openxmlformats.org/drawingml/2006/main" xmlns:r="http://schemas.openxmlformats.org/officeDocument/2006/relationships" xmlns:p="http://schemas.openxmlformats.org/presentationml/2006/main">
+  <p:cSld>
+    <p:spTree>
+      <p:nvGrpSpPr>
+        <p:cNvPr id="1" name=""/>
+        <p:cNvGrpSpPr/>
+        <p:nvPr/>
+      </p:nvGrpSpPr>
+      <p:grpSpPr>
+        <a:xfrm>
+          <a:off x="0" y="0"/>
+          <a:ext cx="0" cy="0"/>
+          <a:chOff x="0" y="0"/>
+          <a:chExt cx="0" cy="0"/>
+        </a:xfrm>
+      </p:grpSpPr>
+      <p:pic>
+        <p:nvPicPr>
+          <p:cNvPr id="4" name="Picture 3">
+            <a:extLst>
+              <a:ext uri="{FF2B5EF4-FFF2-40B4-BE49-F238E27FC236}">
+                <a16:creationId xmlns:a16="http://schemas.microsoft.com/office/drawing/2014/main" id="{81DB75B0-73AA-F222-4940-C7E96583065D}"/>
+              </a:ext>
+            </a:extLst>
+          </p:cNvPr>
+          <p:cNvPicPr>
+            <a:picLocks noChangeAspect="1"/>
+          </p:cNvPicPr>
+          <p:nvPr/>
+        </p:nvPicPr>
+        <p:blipFill>
+          <a:blip r:embed="rId2"/>
+          <a:stretch>
+            <a:fillRect/>
+          </a:stretch>
+        </p:blipFill>
+        <p:spPr>
+          <a:xfrm>
+            <a:off x="3810000" y="0"/>
+            <a:ext cx="4572000" cy="6858000"/>
+          </a:xfrm>
+          <a:prstGeom prst="rect">
+            <a:avLst/>
+          </a:prstGeom>
+        </p:spPr>
+      </p:pic>
+    </p:spTree>
+    <p:extLst>
+      <p:ext uri="{BB962C8B-B14F-4D97-AF65-F5344CB8AC3E}">
+        <p14:creationId xmlns:p14="http://schemas.microsoft.com/office/powerpoint/2010/main" val="2957872646"/>
+      </p:ext>
+    </p:extLst>
+  </p:cSld>
+  <p:clrMapOvr>
+    <a:masterClrMapping/>
+  </p:clrMapOvr>
+</p:sld>
+</file>
+
 <file path=ppt/theme/theme1.xml><?xml version="1.0" encoding="utf-8"?>
 <a:theme xmlns:a="http://schemas.openxmlformats.org/drawingml/2006/main" name="Office Theme">
   <a:themeElements>

--- a/FineTuningPipeLineOpenClaw.pptx
+++ b/FineTuningPipeLineOpenClaw.pptx
@@ -1865,7 +1865,7 @@
           <a:p>
             <a:fld id="{01926CF7-48D8-2F46-AFC8-8A5D2298DFDD}" type="datetimeFigureOut">
               <a:rPr lang="en-US" smtClean="0"/>
-              <a:t>4/30/2026</a:t>
+              <a:t>5/1/2026</a:t>
             </a:fld>
             <a:endParaRPr lang="en-US"/>
           </a:p>
@@ -2349,7 +2349,7 @@
           <a:p>
             <a:r>
               <a:rPr lang="en-US" dirty="0"/>
-              <a:t>- Fine-tuning helps us adjust the model to a user's style and workflow.</a:t>
+              <a:t>- Fine-tuning helps us adjust the model to a user’s reasoning requirement, style and workflow.</a:t>
             </a:r>
           </a:p>
           <a:p>
@@ -2541,31 +2541,43 @@
           <a:lstStyle/>
           <a:p>
             <a:r>
-              <a:rPr lang="en-US"/>
+              <a:rPr lang="en-US" dirty="0"/>
               <a:t>- This is the base model used in the pipeline.</a:t>
             </a:r>
           </a:p>
           <a:p>
             <a:r>
-              <a:rPr lang="en-US"/>
-              <a:t>- It is Qwen2.5 3B Instruct from Unsloth.</a:t>
-            </a:r>
-          </a:p>
-          <a:p>
-            <a:r>
-              <a:rPr lang="en-US"/>
-              <a:t>- I chose a 3B model because it is practical for local use.</a:t>
-            </a:r>
-          </a:p>
-          <a:p>
-            <a:r>
-              <a:rPr lang="en-US"/>
+              <a:rPr lang="en-US" dirty="0"/>
+              <a:t>- It is Qwen2.5 3B Instruct from </a:t>
+            </a:r>
+            <a:r>
+              <a:rPr lang="en-US" dirty="0" err="1"/>
+              <a:t>Unsloth</a:t>
+            </a:r>
+            <a:r>
+              <a:rPr lang="en-US" dirty="0"/>
+              <a:t>.</a:t>
+            </a:r>
+          </a:p>
+          <a:p>
+            <a:r>
+              <a:rPr lang="en-US" dirty="0"/>
+              <a:t>- I chose a 3B model because it is practical for local use in my </a:t>
+            </a:r>
+            <a:r>
+              <a:rPr lang="en-US"/>
+              <a:t>computer with 4GB VRAM.</a:t>
+            </a:r>
+          </a:p>
+          <a:p>
+            <a:r>
+              <a:rPr lang="en-US" dirty="0"/>
               <a:t>- It is also already instruction-tuned.</a:t>
             </a:r>
           </a:p>
           <a:p>
             <a:r>
-              <a:rPr lang="en-US"/>
+              <a:rPr lang="en-US" dirty="0"/>
               <a:t>- That gives us a good starting point for fine-tuning.</a:t>
             </a:r>
           </a:p>
@@ -3114,38 +3126,66 @@
           <a:lstStyle/>
           <a:p>
             <a:r>
-              <a:rPr lang="en-US"/>
+              <a:rPr lang="en-US" dirty="0"/>
               <a:t>- Thank you.</a:t>
             </a:r>
           </a:p>
           <a:p>
             <a:r>
-              <a:rPr lang="en-US"/>
+              <a:rPr lang="en-US" dirty="0"/>
               <a:t>- The key takeaway is that OpenClaw can run with a personalized local LLM.</a:t>
             </a:r>
           </a:p>
           <a:p>
             <a:r>
-              <a:rPr lang="en-US"/>
+              <a:rPr lang="en-US" dirty="0"/>
               <a:t>- This can reduce API cost.</a:t>
             </a:r>
           </a:p>
           <a:p>
             <a:r>
-              <a:rPr lang="en-US"/>
+              <a:rPr lang="en-US" dirty="0"/>
               <a:t>- It can also give more control over model behavior.</a:t>
             </a:r>
           </a:p>
           <a:p>
             <a:r>
-              <a:rPr lang="en-US"/>
+              <a:rPr lang="en-US" dirty="0"/>
               <a:t>- The same pipeline can be repeated with better data or newer models.</a:t>
             </a:r>
           </a:p>
           <a:p>
-            <a:r>
-              <a:rPr lang="en-US"/>
-              <a:t>- I am happy to take questions.</a:t>
+            <a:pPr marL="171450" indent="-171450">
+              <a:buFontTx/>
+              <a:buChar char="-"/>
+            </a:pPr>
+            <a:r>
+              <a:rPr lang="en-US" dirty="0"/>
+              <a:t>I am happy to take questions.</a:t>
+            </a:r>
+          </a:p>
+          <a:p>
+            <a:pPr marL="171450" indent="-171450">
+              <a:buFontTx/>
+              <a:buChar char="-"/>
+            </a:pPr>
+            <a:endParaRPr lang="en-US" dirty="0"/>
+          </a:p>
+          <a:p>
+            <a:pPr marL="171450" indent="-171450">
+              <a:buFontTx/>
+              <a:buChar char="-"/>
+            </a:pPr>
+            <a:endParaRPr lang="en-US" dirty="0"/>
+          </a:p>
+          <a:p>
+            <a:pPr marL="171450" indent="-171450">
+              <a:buFontTx/>
+              <a:buChar char="-"/>
+            </a:pPr>
+            <a:r>
+              <a:rPr lang="en-US"/>
+              <a:t>https://medium.com/@kg.aero/save-costs-and-personalize-openclaw-with-a-fine-tuned-open-source-llm-d33335640367</a:t>
             </a:r>
           </a:p>
         </p:txBody>
